--- a/project_documents/DS785_Presentation4.pptx
+++ b/project_documents/DS785_Presentation4.pptx
@@ -15582,7 +15582,7 @@
           <a:p>
             <a:fld id="{87F82D20-900E-6C40-A05F-D83DFCD9E8C9}" type="datetimeFigureOut">
               <a:rPr lang="en-US" smtClean="0"/>
-              <a:t>7/15/26</a:t>
+              <a:t>7/22/26</a:t>
             </a:fld>
             <a:endParaRPr lang="en-US"/>
           </a:p>
@@ -15991,7 +15991,7 @@
           <a:p>
             <a:r>
               <a:rPr lang="en-US" dirty="0"/>
-              <a:t>This presentation focused on developing, optimizing, and evaluating multiple sentiment-analysis models using the manually labeled mountain bike review dataset. Three complementary modeling approaches were compared using a common evaluation framework, allowing differences in performance to be attributed to the models rather than the evaluation process. While VADER provided a useful rule-based baseline and the pretrained </a:t>
+              <a:t>This presentation focused on developing, optimizing, and evaluating multiple sentiment-analysis models using the manually labeled mountain bike review dataset. Three complementary sentiment-analysis approaches were evaluated using a common validation framework. TF-IDF with Logistic Regression achieved the strongest balanced performance and was selected as the final model. While VADER provided a useful rule-based baseline and the pretrained </a:t>
             </a:r>
             <a:r>
               <a:rPr lang="en-US" dirty="0" err="1"/>
@@ -16220,17 +16220,18 @@
               <a:defRPr/>
             </a:pPr>
             <a:r>
-              <a:rPr lang="en-US" b="0" dirty="0"/>
-              <a:t>Three complementary approaches were selected to evaluate sentiment classification from different machine learning perspectives. VADER was chosen as a traditional rule-based baseline because it requires no training data and is commonly used for general sentiment analysis. The </a:t>
+              <a:rPr lang="en-US" dirty="0"/>
+              <a:t>Three complementary approaches were selected to evaluate sentiment classification from different machine learning perspectives. VADER was chosen as the rule-based baseline because it requires no training data and is widely used for general sentiment analysis. </a:t>
             </a:r>
             <a:r>
-              <a:rPr lang="en-US" b="0" dirty="0" err="1"/>
+              <a:rPr lang="en-US" dirty="0" err="1"/>
               <a:t>RoBERTa</a:t>
             </a:r>
             <a:r>
-              <a:rPr lang="en-US" b="0" dirty="0"/>
-              <a:t> transformer represents a modern pretrained language model that captures contextual relationships between words and has demonstrated strong performance across many NLP tasks without additional training. Historically, sentiment analysis has progressed from lexicon-based methods such as VADER, to pretrained transformer models, and more recently to domain-specific supervised models trained using labeled business data. This project follows that progression by comparing representative approaches from each stage of that evolution. Finally, TF-IDF with logistic regression was selected as the supervised learning approach because it can be trained directly on the manually labeled mountain bike review dataset while remaining computationally efficient and highly interpretable. Comparing these three approaches provides insight into whether increasing model sophistication leads to improved performance within this specialized application domain.</a:t>
+              <a:rPr lang="en-US" dirty="0"/>
+              <a:t> represents a modern pretrained transformer that captures contextual language relationships but was not trained specifically on mountain bike reviews. Finally, TF-IDF with logistic regression was selected as the supervised approach because it learns directly from the manually labeled review dataset while remaining computationally efficient and highly interpretable. Comparing these three models allows us to determine whether greater model complexity improves sentiment classification for this specialized domain.</a:t>
             </a:r>
+            <a:endParaRPr lang="en-US" b="0" dirty="0"/>
           </a:p>
         </p:txBody>
       </p:sp>
@@ -16314,26 +16315,9 @@
           <a:bodyPr/>
           <a:lstStyle/>
           <a:p>
-            <a:pPr marL="0" marR="0" lvl="0" indent="0" algn="l" defTabSz="914400" rtl="0" eaLnBrk="1" fontAlgn="auto" latinLnBrk="0" hangingPunct="1">
-              <a:lnSpc>
-                <a:spcPct val="100000"/>
-              </a:lnSpc>
-              <a:spcBef>
-                <a:spcPts val="0"/>
-              </a:spcBef>
-              <a:spcAft>
-                <a:spcPts val="0"/>
-              </a:spcAft>
-              <a:buClrTx/>
-              <a:buSzTx/>
-              <a:buFontTx/>
-              <a:buNone/>
-              <a:tabLst/>
-              <a:defRPr/>
-            </a:pPr>
             <a:r>
               <a:rPr lang="en-US" dirty="0"/>
-              <a:t>Before developing a supervised model, two baseline approaches were evaluated. VADER served as the traditional baseline because it is a rule-based sentiment analysis method requiring no labeled training data. It scores text using a predefined sentiment lexicon combined with heuristic rules and is widely used as a benchmark for sentiment classification tasks. The second baseline was a pretrained </a:t>
+              <a:t>Before developing the supervised model, two baseline approaches were evaluated. VADER served as the rule-based baseline, using a predefined sentiment lexicon and heuristic rules to classify text without requiring labeled training data. The second baseline was a pretrained </a:t>
             </a:r>
             <a:r>
               <a:rPr lang="en-US" dirty="0" err="1"/>
@@ -16341,28 +16325,8 @@
             </a:r>
             <a:r>
               <a:rPr lang="en-US" dirty="0"/>
-              <a:t> transformer model. Unlike VADER, the transformer evaluates sentiment using contextual language representations and can better capture relationships between words. Because the review articles were much longer than the transformer's maximum input length, each article was divided into overlapping text chunks and the individual predictions were aggregated into a single article-level sentiment prediction. These baseline models established reference points for evaluating whether a supervised model trained specifically on the manually labeled review dataset could improve classification performance. Although these baseline models required little or no training, their performance would ultimately be compared against a supervised model trained specifically on the manually labeled review dataset.</a:t>
+              <a:t> transformer, which analyzes sentiment using contextual language representations. Because the review articles exceeded the transformer's maximum input length, each article was divided into overlapping text chunks and the predictions were aggregated into a single article-level sentiment. These baseline models provided reference points for determining whether a supervised model trained on the manually labeled mountain bike reviews could achieve stronger classification performance.</a:t>
             </a:r>
-          </a:p>
-          <a:p>
-            <a:pPr marL="0" marR="0" lvl="0" indent="0" algn="l" defTabSz="914400" rtl="0" eaLnBrk="1" fontAlgn="auto" latinLnBrk="0" hangingPunct="1">
-              <a:lnSpc>
-                <a:spcPct val="100000"/>
-              </a:lnSpc>
-              <a:spcBef>
-                <a:spcPts val="0"/>
-              </a:spcBef>
-              <a:spcAft>
-                <a:spcPts val="0"/>
-              </a:spcAft>
-              <a:buClrTx/>
-              <a:buSzTx/>
-              <a:buFontTx/>
-              <a:buNone/>
-              <a:tabLst/>
-              <a:defRPr/>
-            </a:pPr>
-            <a:endParaRPr lang="en-US" dirty="0"/>
           </a:p>
         </p:txBody>
       </p:sp>
@@ -16465,7 +16429,7 @@
             </a:pPr>
             <a:r>
               <a:rPr lang="en-US" dirty="0"/>
-              <a:t>After evaluating the baseline approaches, a supervised machine learning model was developed using the manually labeled review dataset. Each review article was converted into a TF-IDF feature vector, which represents the importance of each term relative to the entire collection of reviews. These vectors formed the input to a logistic regression classifier that was trained to distinguish Positive from Not Positive reviews. Unlike the baseline models, this approach learns directly from the project data, allowing it to recognize vocabulary and language patterns specific to mountain bike product reviews. Logistic regression was selected because it performs well with high-dimensional text data, produces probabilistic predictions, and provides interpretable feature coefficients that can later be used to explain model behavior. The architecture shown here defines the model itself. The next step was determining which parameter settings produced the best performance through hyperparameter tuning and cross-validation.</a:t>
+              <a:t>After evaluating the baseline approaches, a supervised machine learning model was developed using the manually labeled review dataset. Each review article was converted into a TF-IDF feature vector, representing the importance of terms across the review collection. These feature vectors served as input to a logistic regression classifier trained to distinguish Positive from Not Positive reviews. Unlike the baseline approaches, this model learns directly from the labeled data, allowing it to recognize domain-specific mountain bike terminology. Logistic regression was selected because it performs well with high-dimensional text data while providing interpretable feature coefficients. The architecture shown here defines the model, and the next step was optimizing its performance through hyperparameter tuning and cross-validation.</a:t>
             </a:r>
           </a:p>
         </p:txBody>
@@ -16551,34 +16515,16 @@
           <a:lstStyle/>
           <a:p>
             <a:r>
-              <a:rPr lang="en-US" b="0" dirty="0"/>
-              <a:t>After defining the supervised model, the next step was to optimize its performance through hyperparameter tuning. </a:t>
+              <a:rPr lang="en-US" dirty="0"/>
+              <a:t>After defining the supervised model, the next step was hyperparameter tuning. </a:t>
             </a:r>
             <a:r>
-              <a:rPr lang="en-US" b="0" dirty="0" err="1"/>
+              <a:rPr lang="en-US" dirty="0" err="1"/>
               <a:t>GridSearchCV</a:t>
             </a:r>
             <a:r>
-              <a:rPr lang="en-US" b="0" dirty="0"/>
-              <a:t> was used to evaluate 120 combinations of TF-IDF vectorization and logistic regression parameters, including document frequency thresholds, n-gram configurations, regularization strength, and class weighting. Each parameter combination was evaluated using five-fold stratified cross-validation, resulting in a total of 600 model fits.</a:t>
-            </a:r>
-          </a:p>
-          <a:p>
-            <a:r>
-              <a:rPr lang="en-US" b="0" dirty="0"/>
-              <a:t>Five-fold cross-validation was selected because it provides a balance between reliable performance estimation and computational efficiency for a dataset of 301 labeled reviews. Stratification ensured that each fold preserved the proportion of Positive and Not Positive reviews, producing more consistent validation results despite the class imbalance.</a:t>
-            </a:r>
-          </a:p>
-          <a:p>
-            <a:r>
-              <a:rPr lang="en-US" b="0" dirty="0"/>
-              <a:t>Macro F1 score was selected as the optimization metric because it balances precision and recall across both sentiment classes while reducing the influence of class imbalance. The best-performing configuration used a regularization parameter of 0.1, balanced class weights, unigram features, and document frequency thresholds of two and 0.85, achieving a cross-validation Macro F1 score of 0.543.</a:t>
-            </a:r>
-          </a:p>
-          <a:p>
-            <a:r>
-              <a:rPr lang="en-US" b="0" dirty="0"/>
-              <a:t>With the optimal model selected, the final step was to evaluate its performance on the held-out test set and compare it with the baseline models.</a:t>
+              <a:rPr lang="en-US" dirty="0"/>
+              <a:t> evaluated 120 combinations of TF-IDF vectorization and logistic regression parameters using five-fold stratified cross-validation, resulting in 600 total model fits. Stratification preserved the proportion of Positive and Not Positive reviews in each fold, providing a reliable estimate of model performance despite the class imbalance. Macro F1 was selected as the optimization metric because it balances precision and recall across both classes. The best-performing configuration used a regularization parameter of 0.1, balanced class weights, unigram features, and document frequency thresholds of two and 0.85, achieving a cross-validation Macro F1 score of 0.543. With the optimal model selected, the final step was to evaluate its performance on the held-out test set and compare it with the baseline models.</a:t>
             </a:r>
           </a:p>
         </p:txBody>
@@ -16665,19 +16611,7 @@
           <a:p>
             <a:r>
               <a:rPr lang="en-US" dirty="0"/>
-              <a:t>This slide compares the final performance of the three sentiment-analysis approaches using the same manually labeled test dataset. While VADER achieved the highest overall accuracy at 78.4 percent, that result is largely influenced by the class imbalance because most reviews were labeled as Positive. As a result, accuracy alone does not fully reflect model performance for this classification problem.</a:t>
-            </a:r>
-          </a:p>
-          <a:p>
-            <a:r>
-              <a:rPr lang="en-US" dirty="0"/>
-              <a:t>For that reason, Balanced Accuracy, Macro F1, and ROC AUC were used to provide a more complete evaluation. Balanced Accuracy measures how well the model performs across both sentiment classes, Macro F1 equally weights precision and recall for each class, and ROC AUC evaluates the model's ability to distinguish between Positive and Not Positive reviews across different classification thresholds.</a:t>
-            </a:r>
-          </a:p>
-          <a:p>
-            <a:r>
-              <a:rPr lang="en-US" dirty="0"/>
-              <a:t>Using these metrics, the TF-IDF logistic regression model consistently outperformed both baseline approaches. It achieved the highest Balanced Accuracy of 0.597, the highest Macro F1 score of 0.564, and the highest ROC AUC of 0.665. These results indicate that training directly on the manually labeled mountain bike review dataset enabled the supervised model to better capture domain-specific sentiment than either the rule-based VADER baseline or the pretrained </a:t>
+              <a:t>This slide compares the performance of the three sentiment-analysis approaches using the same manually labeled test dataset. Although VADER achieved the highest overall accuracy at 78.4 percent, accuracy alone is misleading because the dataset is heavily imbalanced toward Positive reviews. For that reason, Balanced Accuracy, Macro F1, and ROC AUC were used to provide a more meaningful comparison across both sentiment classes. Using these metrics, the TF-IDF logistic regression model consistently outperformed both baseline approaches, achieving the highest Balanced Accuracy of 0.597, Macro F1 score of 0.564, and ROC AUC of 0.665. These results demonstrate that training directly on the manually labeled mountain bike review dataset enabled the supervised model to better capture domain-specific sentiment than either the rule-based VADER baseline or the pretrained </a:t>
             </a:r>
             <a:r>
               <a:rPr lang="en-US" dirty="0" err="1"/>
@@ -16778,13 +16712,13 @@
           <a:p>
             <a:r>
               <a:rPr lang="en-US" dirty="0"/>
-              <a:t>Examination of the learned feature coefficients showed that the model relied heavily on technical product vocabulary rather than traditional opinion words. This reflects the nature of professional mountain bike reviews, where sentiment is commonly expressed through discussions of suspension performance, component quality, climbing efficiency, and ride characteristics instead of explicitly positive or negative language.</a:t>
+              <a:t>Feature importance showed that the model relied heavily on technical product vocabulary rather than traditional opinion words. This reflects the nature of professional mountain bike reviews, where sentiment is commonly expressed through discussions of suspension performance, component quality, climbing efficiency, and ride characteristics instead of explicitly positive or negative language.</a:t>
             </a:r>
           </a:p>
           <a:p>
             <a:r>
               <a:rPr lang="en-US" dirty="0"/>
-              <a:t>These findings also highlight an important limitation of the project. With only 301 manually labeled reviews, the model learned to associate domain-specific terminology with sentiment, reducing overall interpretability. Increasing the size of the labeled dataset or fine-tuning a domain-specific transformer would likely improve the model's ability to distinguish nuanced mixed sentiment while maintaining strong predictive performance.</a:t>
+              <a:t>These findings also highlight a limitation of the project. With only 301 manually labeled reviews, the model learned to associate domain-specific terminology with sentiment, reducing overall interpretability. Increasing the size of the labeled dataset or fine-tuning a domain-specific transformer would likely improve the model's ability to distinguish nuanced mixed sentiment while maintaining strong predictive performance.</a:t>
             </a:r>
           </a:p>
         </p:txBody>
@@ -16871,13 +16805,21 @@
           <a:p>
             <a:r>
               <a:rPr lang="en-US" dirty="0"/>
-              <a:t>Beyond selecting the best-performing model, this project provides several practical insights for both business applications and future NLP research. From a business perspective, the supervised model demonstrated that sentiment analysis can summarize long-form product reviews at scale while supporting comparisons across brands, product categories, and review types. Because the logistic regression model is interpretable, it also provides transparency into the language influencing predictions, making the results easier to explain to business stakeholders.</a:t>
+              <a:t>Beyond selecting the best-performing model, this project provides practical insights for both business applications and future NLP research. From a business perspective, the supervised model demonstrated that sentiment analysis can summarize long-form product reviews at scale while supporting comparisons across brands, product categories, and review types. Because the logistic regression model is interpretable, it also provides transparency into the language influencing predictions, making the results easier to explain to business stakeholders.</a:t>
             </a:r>
           </a:p>
           <a:p>
             <a:r>
               <a:rPr lang="en-US" dirty="0"/>
-              <a:t>From a research perspective, the comparison of rule-based, pretrained, and supervised approaches showed that increasing model complexity alone does not guarantee improved performance. Although the pretrained transformer represents a more advanced architecture, it was not trained specifically on mountain bike reviews and therefore transferred poorly to this specialized domain. In contrast, the supervised TF-IDF logistic regression model benefited from project-specific labeled data and achieved the strongest overall balanced performance.</a:t>
+              <a:t>From a research perspective, the comparison showed that greater model complexity alone did not guarantee better performance. Although the pretrained </a:t>
+            </a:r>
+            <a:r>
+              <a:rPr lang="en-US" dirty="0" err="1"/>
+              <a:t>RoBERTa</a:t>
+            </a:r>
+            <a:r>
+              <a:rPr lang="en-US" dirty="0"/>
+              <a:t> transformer represents a more advanced architecture, it was not trained specifically on mountain bike reviews and therefore transferred poorly to this specialized domain. In contrast, the supervised TF-IDF logistic regression model benefited from project-specific labeled data and achieved the strongest balanced performance.</a:t>
             </a:r>
           </a:p>
           <a:p>
@@ -17112,7 +17054,7 @@
           <a:p>
             <a:fld id="{755DF60E-8B57-924B-825F-23BE3BB50F9C}" type="datetimeFigureOut">
               <a:rPr lang="en-US" smtClean="0"/>
-              <a:t>7/15/26</a:t>
+              <a:t>7/22/26</a:t>
             </a:fld>
             <a:endParaRPr lang="en-US"/>
           </a:p>
@@ -17457,7 +17399,7 @@
           <a:p>
             <a:fld id="{755DF60E-8B57-924B-825F-23BE3BB50F9C}" type="datetimeFigureOut">
               <a:rPr lang="en-US" smtClean="0"/>
-              <a:t>7/15/26</a:t>
+              <a:t>7/22/26</a:t>
             </a:fld>
             <a:endParaRPr lang="en-US"/>
           </a:p>
@@ -17858,7 +17800,7 @@
           <a:p>
             <a:fld id="{755DF60E-8B57-924B-825F-23BE3BB50F9C}" type="datetimeFigureOut">
               <a:rPr lang="en-US" smtClean="0"/>
-              <a:t>7/15/26</a:t>
+              <a:t>7/22/26</a:t>
             </a:fld>
             <a:endParaRPr lang="en-US"/>
           </a:p>
@@ -18194,7 +18136,7 @@
           <a:p>
             <a:fld id="{755DF60E-8B57-924B-825F-23BE3BB50F9C}" type="datetimeFigureOut">
               <a:rPr lang="en-US" smtClean="0"/>
-              <a:t>7/15/26</a:t>
+              <a:t>7/22/26</a:t>
             </a:fld>
             <a:endParaRPr lang="en-US"/>
           </a:p>
@@ -18514,7 +18456,7 @@
           <a:p>
             <a:fld id="{755DF60E-8B57-924B-825F-23BE3BB50F9C}" type="datetimeFigureOut">
               <a:rPr lang="en-US" smtClean="0"/>
-              <a:t>7/15/26</a:t>
+              <a:t>7/22/26</a:t>
             </a:fld>
             <a:endParaRPr lang="en-US"/>
           </a:p>
@@ -18910,7 +18852,7 @@
           <a:p>
             <a:fld id="{755DF60E-8B57-924B-825F-23BE3BB50F9C}" type="datetimeFigureOut">
               <a:rPr lang="en-US" smtClean="0"/>
-              <a:t>7/15/26</a:t>
+              <a:t>7/22/26</a:t>
             </a:fld>
             <a:endParaRPr lang="en-US"/>
           </a:p>
@@ -19167,7 +19109,7 @@
           <a:p>
             <a:fld id="{755DF60E-8B57-924B-825F-23BE3BB50F9C}" type="datetimeFigureOut">
               <a:rPr lang="en-US" smtClean="0"/>
-              <a:t>7/15/26</a:t>
+              <a:t>7/22/26</a:t>
             </a:fld>
             <a:endParaRPr lang="en-US"/>
           </a:p>
@@ -19429,7 +19371,7 @@
           <a:p>
             <a:fld id="{755DF60E-8B57-924B-825F-23BE3BB50F9C}" type="datetimeFigureOut">
               <a:rPr lang="en-US" smtClean="0"/>
-              <a:t>7/15/26</a:t>
+              <a:t>7/22/26</a:t>
             </a:fld>
             <a:endParaRPr lang="en-US"/>
           </a:p>
@@ -19691,7 +19633,7 @@
           <a:p>
             <a:fld id="{755DF60E-8B57-924B-825F-23BE3BB50F9C}" type="datetimeFigureOut">
               <a:rPr lang="en-US" smtClean="0"/>
-              <a:t>7/15/26</a:t>
+              <a:t>7/22/26</a:t>
             </a:fld>
             <a:endParaRPr lang="en-US"/>
           </a:p>
@@ -20020,7 +19962,7 @@
           <a:p>
             <a:fld id="{755DF60E-8B57-924B-825F-23BE3BB50F9C}" type="datetimeFigureOut">
               <a:rPr lang="en-US" smtClean="0"/>
-              <a:t>7/15/26</a:t>
+              <a:t>7/22/26</a:t>
             </a:fld>
             <a:endParaRPr lang="en-US"/>
           </a:p>
@@ -20343,7 +20285,7 @@
           <a:p>
             <a:fld id="{755DF60E-8B57-924B-825F-23BE3BB50F9C}" type="datetimeFigureOut">
               <a:rPr lang="en-US" smtClean="0"/>
-              <a:t>7/15/26</a:t>
+              <a:t>7/22/26</a:t>
             </a:fld>
             <a:endParaRPr lang="en-US"/>
           </a:p>
@@ -20807,7 +20749,7 @@
           <a:p>
             <a:fld id="{755DF60E-8B57-924B-825F-23BE3BB50F9C}" type="datetimeFigureOut">
               <a:rPr lang="en-US" smtClean="0"/>
-              <a:t>7/15/26</a:t>
+              <a:t>7/22/26</a:t>
             </a:fld>
             <a:endParaRPr lang="en-US"/>
           </a:p>
@@ -21012,7 +20954,7 @@
           <a:p>
             <a:fld id="{755DF60E-8B57-924B-825F-23BE3BB50F9C}" type="datetimeFigureOut">
               <a:rPr lang="en-US" smtClean="0"/>
-              <a:t>7/15/26</a:t>
+              <a:t>7/22/26</a:t>
             </a:fld>
             <a:endParaRPr lang="en-US"/>
           </a:p>
@@ -21189,7 +21131,7 @@
           <a:p>
             <a:fld id="{755DF60E-8B57-924B-825F-23BE3BB50F9C}" type="datetimeFigureOut">
               <a:rPr lang="en-US" smtClean="0"/>
-              <a:t>7/15/26</a:t>
+              <a:t>7/22/26</a:t>
             </a:fld>
             <a:endParaRPr lang="en-US"/>
           </a:p>
@@ -21522,7 +21464,7 @@
           <a:p>
             <a:fld id="{755DF60E-8B57-924B-825F-23BE3BB50F9C}" type="datetimeFigureOut">
               <a:rPr lang="en-US" smtClean="0"/>
-              <a:t>7/15/26</a:t>
+              <a:t>7/22/26</a:t>
             </a:fld>
             <a:endParaRPr lang="en-US"/>
           </a:p>
@@ -21867,7 +21809,7 @@
           <a:p>
             <a:fld id="{755DF60E-8B57-924B-825F-23BE3BB50F9C}" type="datetimeFigureOut">
               <a:rPr lang="en-US" smtClean="0"/>
-              <a:t>7/15/26</a:t>
+              <a:t>7/22/26</a:t>
             </a:fld>
             <a:endParaRPr lang="en-US"/>
           </a:p>
@@ -24159,7 +24101,7 @@
           <a:p>
             <a:fld id="{755DF60E-8B57-924B-825F-23BE3BB50F9C}" type="datetimeFigureOut">
               <a:rPr lang="en-US" smtClean="0"/>
-              <a:t>7/15/26</a:t>
+              <a:t>7/22/26</a:t>
             </a:fld>
             <a:endParaRPr lang="en-US"/>
           </a:p>
@@ -27350,7 +27292,7 @@
         <p:spPr>
           <a:xfrm>
             <a:off x="687390" y="4714240"/>
-            <a:ext cx="6312268" cy="954107"/>
+            <a:ext cx="6312268" cy="1200329"/>
           </a:xfrm>
           <a:prstGeom prst="rect">
             <a:avLst/>
@@ -27364,12 +27306,64 @@
           <a:lstStyle/>
           <a:p>
             <a:r>
-              <a:rPr lang="en-US" sz="1400" b="1" dirty="0"/>
+              <a:rPr lang="en-US" sz="1600" b="1" dirty="0"/>
               <a:t>Key Finding:</a:t>
             </a:r>
             <a:r>
               <a:rPr lang="en-US" sz="1400" dirty="0"/>
-              <a:t> Although VADER achieved the highest overall accuracy, TF-IDF + Logistic Regression produced the strongest balanced performance, achieving the highest Balanced Accuracy, Macro F1, and ROC AUC.</a:t>
+              <a:t> </a:t>
+            </a:r>
+          </a:p>
+          <a:p>
+            <a:r>
+              <a:rPr lang="en-US" sz="1400" dirty="0"/>
+              <a:t>☑️ </a:t>
+            </a:r>
+            <a:r>
+              <a:rPr lang="en-US" sz="1400" b="1" dirty="0"/>
+              <a:t>TF-IDF + </a:t>
+            </a:r>
+            <a:r>
+              <a:rPr lang="en-US" sz="1400" b="1" dirty="0" err="1"/>
+              <a:t>Logicistic</a:t>
+            </a:r>
+            <a:r>
+              <a:rPr lang="en-US" sz="1400" b="1" dirty="0"/>
+              <a:t> Regression</a:t>
+            </a:r>
+            <a:r>
+              <a:rPr lang="en-US" sz="1400" dirty="0"/>
+              <a:t> selected as the final model</a:t>
+            </a:r>
+          </a:p>
+          <a:p>
+            <a:pPr marL="285750" indent="-285750">
+              <a:buFont typeface="Arial" panose="020B0604020202020204" pitchFamily="34" charset="0"/>
+              <a:buChar char="•"/>
+            </a:pPr>
+            <a:r>
+              <a:rPr lang="en-US" sz="1400" dirty="0"/>
+              <a:t>Highest Balanced Accuracy (0.597)</a:t>
+            </a:r>
+          </a:p>
+          <a:p>
+            <a:pPr marL="285750" indent="-285750">
+              <a:buFont typeface="Arial" panose="020B0604020202020204" pitchFamily="34" charset="0"/>
+              <a:buChar char="•"/>
+            </a:pPr>
+            <a:r>
+              <a:rPr lang="en-US" sz="1400" dirty="0"/>
+              <a:t>Highest Macro F1 (0.564)</a:t>
+            </a:r>
+          </a:p>
+          <a:p>
+            <a:pPr marL="285750" indent="-285750">
+              <a:buFont typeface="Arial" panose="020B0604020202020204" pitchFamily="34" charset="0"/>
+              <a:buChar char="•"/>
+            </a:pPr>
+            <a:r>
+              <a:rPr lang="en-US" sz="1400" dirty="0"/>
+              <a:t>Highest ROC AUC (0.665)</a:t>
             </a:r>
           </a:p>
         </p:txBody>
@@ -27576,7 +27570,7 @@
         <p:spPr>
           <a:xfrm>
             <a:off x="7048767" y="4216400"/>
-            <a:ext cx="4455844" cy="2092881"/>
+            <a:ext cx="4455844" cy="2308324"/>
           </a:xfrm>
           <a:prstGeom prst="rect">
             <a:avLst/>
@@ -27631,7 +27625,7 @@
             </a:pPr>
             <a:r>
               <a:rPr lang="en-US" sz="1400" dirty="0"/>
-              <a:t>Product-specific terminology limited overall interpretability</a:t>
+              <a:t>Feature importance reflected highly domain-specific terminology, reducing generalizability beyond mountain bike reviews</a:t>
             </a:r>
           </a:p>
         </p:txBody>
@@ -27855,7 +27849,7 @@
             <a:pPr lvl="0"/>
             <a:r>
               <a:rPr lang="en-US" sz="1900" dirty="0"/>
-              <a:t>Class imbalance and limited labeled data constrained predictive performance. </a:t>
+              <a:t>Class imbalance required combining Mixed and Negative reviews into a single Not Positive class, limiting the ability to model nuanced sentiment</a:t>
             </a:r>
           </a:p>
           <a:p>
